--- a/src/ppt-super/assets/tpl-02-stage-evolution/template.pptx
+++ b/src/ppt-super/assets/tpl-02-stage-evolution/template.pptx
@@ -3136,7 +3136,14 @@
           <a:bodyPr rtlCol="0" anchor="ctr"/>
           <a:lstStyle/>
           <a:p>
-            <a:pPr algn="ctr"/>
+            <a:pPr algn="ctr">
+              <a:spcBef>
+                <a:spcPts val="0"/>
+              </a:spcBef>
+              <a:spcAft>
+                <a:spcPts val="0"/>
+              </a:spcAft>
+            </a:pPr>
           </a:p>
         </p:txBody>
       </p:sp>
@@ -3166,14 +3173,21 @@
               <a:lnSpc>
                 <a:spcPct val="112000"/>
               </a:lnSpc>
+              <a:spcBef>
+                <a:spcPts val="0"/>
+              </a:spcBef>
+              <a:spcAft>
+                <a:spcPts val="0"/>
+              </a:spcAft>
             </a:pPr>
             <a:r>
-              <a:rPr sz="1400" b="1" i="0">
+              <a:rPr sz="1400" b="1" i="0" lang="zh-CN" altLang="zh-CN">
                 <a:solidFill>
                   <a:srgbClr val="FFFFFF"/>
                 </a:solidFill>
                 <a:latin typeface="Microsoft YaHei"/>
                 <a:ea typeface="Microsoft YaHei"/>
+                <a:cs typeface="Microsoft YaHei"/>
               </a:rPr>
               <a:t>智能调度</a:t>
             </a:r>
@@ -3206,14 +3220,21 @@
               <a:lnSpc>
                 <a:spcPct val="112000"/>
               </a:lnSpc>
+              <a:spcBef>
+                <a:spcPts val="0"/>
+              </a:spcBef>
+              <a:spcAft>
+                <a:spcPts val="0"/>
+              </a:spcAft>
             </a:pPr>
             <a:r>
-              <a:rPr sz="2200" b="1" i="0">
+              <a:rPr sz="2200" b="1" i="0" lang="zh-CN" altLang="zh-CN">
                 <a:solidFill>
                   <a:srgbClr val="B90A0A"/>
                 </a:solidFill>
                 <a:latin typeface="Microsoft YaHei"/>
                 <a:ea typeface="Microsoft YaHei"/>
+                <a:cs typeface="Microsoft YaHei"/>
               </a:rPr>
               <a:t>L2 调度模型四阶段演进: 从规则基线到全网自智, 小区吞吐累计 +20%</a:t>
             </a:r>
@@ -3300,7 +3321,14 @@
           <a:bodyPr rtlCol="0" anchor="ctr"/>
           <a:lstStyle/>
           <a:p>
-            <a:pPr algn="ctr"/>
+            <a:pPr algn="ctr">
+              <a:spcBef>
+                <a:spcPts val="0"/>
+              </a:spcBef>
+              <a:spcAft>
+                <a:spcPts val="0"/>
+              </a:spcAft>
+            </a:pPr>
           </a:p>
         </p:txBody>
       </p:sp>
@@ -3344,7 +3372,14 @@
           <a:bodyPr rtlCol="0" anchor="ctr"/>
           <a:lstStyle/>
           <a:p>
-            <a:pPr algn="ctr"/>
+            <a:pPr algn="ctr">
+              <a:spcBef>
+                <a:spcPts val="0"/>
+              </a:spcBef>
+              <a:spcAft>
+                <a:spcPts val="0"/>
+              </a:spcAft>
+            </a:pPr>
           </a:p>
         </p:txBody>
       </p:sp>
@@ -3374,14 +3409,21 @@
               <a:lnSpc>
                 <a:spcPct val="112000"/>
               </a:lnSpc>
+              <a:spcBef>
+                <a:spcPts val="0"/>
+              </a:spcBef>
+              <a:spcAft>
+                <a:spcPts val="0"/>
+              </a:spcAft>
             </a:pPr>
             <a:r>
-              <a:rPr sz="1500" b="1" i="0">
+              <a:rPr sz="1500" b="1" i="0" lang="zh-CN" altLang="zh-CN">
                 <a:solidFill>
                   <a:srgbClr val="262626"/>
                 </a:solidFill>
                 <a:latin typeface="Microsoft YaHei"/>
                 <a:ea typeface="Microsoft YaHei"/>
+                <a:cs typeface="Microsoft YaHei"/>
               </a:rPr>
               <a:t>基线 · 规则调度</a:t>
             </a:r>
@@ -3414,14 +3456,21 @@
               <a:lnSpc>
                 <a:spcPct val="112000"/>
               </a:lnSpc>
+              <a:spcBef>
+                <a:spcPts val="0"/>
+              </a:spcBef>
+              <a:spcAft>
+                <a:spcPts val="0"/>
+              </a:spcAft>
             </a:pPr>
             <a:r>
-              <a:rPr sz="1050" b="0" i="0">
+              <a:rPr sz="1050" b="0" i="0" lang="zh-CN" altLang="zh-CN">
                 <a:solidFill>
                   <a:srgbClr val="595959"/>
                 </a:solidFill>
                 <a:latin typeface="Microsoft YaHei"/>
                 <a:ea typeface="Microsoft YaHei"/>
+                <a:cs typeface="Microsoft YaHei"/>
               </a:rPr>
               <a:t>2024H2 现网基线</a:t>
             </a:r>
@@ -3436,8 +3485,8 @@
         </p:nvSpPr>
         <p:spPr>
           <a:xfrm>
-            <a:off x="1485900" y="1566718"/>
-            <a:ext cx="304800" cy="304800"/>
+            <a:off x="1410462" y="1471087"/>
+            <a:ext cx="455676" cy="496062"/>
           </a:xfrm>
           <a:prstGeom prst="rect">
             <a:avLst/>
@@ -3454,14 +3503,21 @@
               <a:lnSpc>
                 <a:spcPct val="112000"/>
               </a:lnSpc>
+              <a:spcBef>
+                <a:spcPts val="0"/>
+              </a:spcBef>
+              <a:spcAft>
+                <a:spcPts val="0"/>
+              </a:spcAft>
             </a:pPr>
             <a:r>
-              <a:rPr sz="3000" b="1" i="0">
+              <a:rPr sz="3000" b="1" i="0" lang="zh-CN" altLang="zh-CN">
                 <a:solidFill>
                   <a:srgbClr val="1F4E79"/>
                 </a:solidFill>
                 <a:latin typeface="Microsoft YaHei"/>
                 <a:ea typeface="Microsoft YaHei"/>
+                <a:cs typeface="Microsoft YaHei"/>
               </a:rPr>
               <a:t>⚙</a:t>
             </a:r>
@@ -3494,14 +3550,21 @@
               <a:lnSpc>
                 <a:spcPct val="130000"/>
               </a:lnSpc>
+              <a:spcBef>
+                <a:spcPts val="0"/>
+              </a:spcBef>
+              <a:spcAft>
+                <a:spcPts val="0"/>
+              </a:spcAft>
             </a:pPr>
             <a:r>
-              <a:rPr sz="1100" b="0" i="0">
+              <a:rPr sz="1100" b="0" i="0" lang="zh-CN" altLang="zh-CN">
                 <a:solidFill>
                   <a:srgbClr val="262626"/>
                 </a:solidFill>
                 <a:latin typeface="Microsoft YaHei"/>
                 <a:ea typeface="Microsoft YaHei"/>
+                <a:cs typeface="Microsoft YaHei"/>
               </a:rPr>
               <a:t>现网调度依赖专家经验参数模板, OLLA 与 MCS 采用固定门限, 单轮调优周期约两周且场景泛化能力弱。边缘用户体验波动较大, 故障回溯依赖人工日志, 小区吞吐长期停留在 1.00x 基线水平, 规则体系已触及人工优化的能力天花板, 亟需引入数据驱动的智能化手段。</a:t>
             </a:r>
@@ -3548,7 +3611,14 @@
           <a:bodyPr rtlCol="0" anchor="ctr"/>
           <a:lstStyle/>
           <a:p>
-            <a:pPr algn="ctr"/>
+            <a:pPr algn="ctr">
+              <a:spcBef>
+                <a:spcPts val="0"/>
+              </a:spcBef>
+              <a:spcAft>
+                <a:spcPts val="0"/>
+              </a:spcAft>
+            </a:pPr>
           </a:p>
         </p:txBody>
       </p:sp>
@@ -3578,14 +3648,21 @@
               <a:lnSpc>
                 <a:spcPct val="112000"/>
               </a:lnSpc>
+              <a:spcBef>
+                <a:spcPts val="0"/>
+              </a:spcBef>
+              <a:spcAft>
+                <a:spcPts val="0"/>
+              </a:spcAft>
             </a:pPr>
             <a:r>
-              <a:rPr sz="1250" b="1" i="0">
+              <a:rPr sz="1250" b="1" i="0" lang="zh-CN" altLang="zh-CN">
                 <a:solidFill>
                   <a:srgbClr val="262626"/>
                 </a:solidFill>
                 <a:latin typeface="Microsoft YaHei"/>
                 <a:ea typeface="Microsoft YaHei"/>
+                <a:cs typeface="Microsoft YaHei"/>
               </a:rPr>
               <a:t>人工调优 2 周</a:t>
             </a:r>
@@ -3654,14 +3731,21 @@
               <a:lnSpc>
                 <a:spcPct val="112000"/>
               </a:lnSpc>
+              <a:spcBef>
+                <a:spcPts val="0"/>
+              </a:spcBef>
+              <a:spcAft>
+                <a:spcPts val="0"/>
+              </a:spcAft>
             </a:pPr>
             <a:r>
-              <a:rPr sz="950" b="0" i="0">
+              <a:rPr sz="950" b="0" i="0" lang="zh-CN" altLang="zh-CN">
                 <a:solidFill>
                   <a:srgbClr val="595959"/>
                 </a:solidFill>
                 <a:latin typeface="Microsoft YaHei"/>
                 <a:ea typeface="Microsoft YaHei"/>
+                <a:cs typeface="Microsoft YaHei"/>
               </a:rPr>
               <a:t>小区吞吐 (相对基线)</a:t>
             </a:r>
@@ -3676,8 +3760,8 @@
         </p:nvSpPr>
         <p:spPr>
           <a:xfrm>
-            <a:off x="457200" y="4305300"/>
-            <a:ext cx="2362200" cy="381000"/>
+            <a:off x="457200" y="4247324"/>
+            <a:ext cx="2362200" cy="496951"/>
           </a:xfrm>
           <a:prstGeom prst="rect">
             <a:avLst/>
@@ -3694,14 +3778,21 @@
               <a:lnSpc>
                 <a:spcPct val="112000"/>
               </a:lnSpc>
+              <a:spcBef>
+                <a:spcPts val="0"/>
+              </a:spcBef>
+              <a:spcAft>
+                <a:spcPts val="0"/>
+              </a:spcAft>
             </a:pPr>
             <a:r>
-              <a:rPr sz="3000" b="1" i="0">
+              <a:rPr sz="3000" b="1" i="0" lang="zh-CN" altLang="zh-CN">
                 <a:solidFill>
                   <a:srgbClr val="1F4E79"/>
                 </a:solidFill>
                 <a:latin typeface="Microsoft YaHei"/>
                 <a:ea typeface="Microsoft YaHei"/>
+                <a:cs typeface="Microsoft YaHei"/>
               </a:rPr>
               <a:t>1.00x</a:t>
             </a:r>
@@ -3748,7 +3839,14 @@
           <a:bodyPr rtlCol="0" anchor="ctr"/>
           <a:lstStyle/>
           <a:p>
-            <a:pPr algn="ctr"/>
+            <a:pPr algn="ctr">
+              <a:spcBef>
+                <a:spcPts val="0"/>
+              </a:spcBef>
+              <a:spcAft>
+                <a:spcPts val="0"/>
+              </a:spcAft>
+            </a:pPr>
           </a:p>
         </p:txBody>
       </p:sp>
@@ -3794,7 +3892,14 @@
           <a:bodyPr rtlCol="0" anchor="ctr"/>
           <a:lstStyle/>
           <a:p>
-            <a:pPr algn="ctr"/>
+            <a:pPr algn="ctr">
+              <a:spcBef>
+                <a:spcPts val="0"/>
+              </a:spcBef>
+              <a:spcAft>
+                <a:spcPts val="0"/>
+              </a:spcAft>
+            </a:pPr>
           </a:p>
         </p:txBody>
       </p:sp>
@@ -3840,7 +3945,14 @@
           <a:bodyPr rtlCol="0" anchor="ctr"/>
           <a:lstStyle/>
           <a:p>
-            <a:pPr algn="ctr"/>
+            <a:pPr algn="ctr">
+              <a:spcBef>
+                <a:spcPts val="0"/>
+              </a:spcBef>
+              <a:spcAft>
+                <a:spcPts val="0"/>
+              </a:spcAft>
+            </a:pPr>
           </a:p>
         </p:txBody>
       </p:sp>
@@ -3886,7 +3998,14 @@
           <a:bodyPr rtlCol="0" anchor="ctr"/>
           <a:lstStyle/>
           <a:p>
-            <a:pPr algn="ctr"/>
+            <a:pPr algn="ctr">
+              <a:spcBef>
+                <a:spcPts val="0"/>
+              </a:spcBef>
+              <a:spcAft>
+                <a:spcPts val="0"/>
+              </a:spcAft>
+            </a:pPr>
           </a:p>
         </p:txBody>
       </p:sp>
@@ -3916,14 +4035,21 @@
               <a:lnSpc>
                 <a:spcPct val="112000"/>
               </a:lnSpc>
+              <a:spcBef>
+                <a:spcPts val="0"/>
+              </a:spcBef>
+              <a:spcAft>
+                <a:spcPts val="0"/>
+              </a:spcAft>
             </a:pPr>
             <a:r>
-              <a:rPr sz="900" b="0" i="0">
+              <a:rPr sz="900" b="0" i="0" lang="zh-CN" altLang="zh-CN">
                 <a:solidFill>
                   <a:srgbClr val="595959"/>
                 </a:solidFill>
                 <a:latin typeface="Microsoft YaHei"/>
                 <a:ea typeface="Microsoft YaHei"/>
+                <a:cs typeface="Microsoft YaHei"/>
               </a:rPr>
               <a:t>演进进度 1/4</a:t>
             </a:r>
@@ -3970,7 +4096,14 @@
           <a:bodyPr rtlCol="0" anchor="ctr"/>
           <a:lstStyle/>
           <a:p>
-            <a:pPr algn="ctr"/>
+            <a:pPr algn="ctr">
+              <a:spcBef>
+                <a:spcPts val="0"/>
+              </a:spcBef>
+              <a:spcAft>
+                <a:spcPts val="0"/>
+              </a:spcAft>
+            </a:pPr>
           </a:p>
         </p:txBody>
       </p:sp>
@@ -4016,7 +4149,14 @@
           <a:bodyPr rtlCol="0" anchor="ctr"/>
           <a:lstStyle/>
           <a:p>
-            <a:pPr algn="ctr"/>
+            <a:pPr algn="ctr">
+              <a:spcBef>
+                <a:spcPts val="0"/>
+              </a:spcBef>
+              <a:spcAft>
+                <a:spcPts val="0"/>
+              </a:spcAft>
+            </a:pPr>
           </a:p>
         </p:txBody>
       </p:sp>
@@ -4060,7 +4200,14 @@
           <a:bodyPr rtlCol="0" anchor="ctr"/>
           <a:lstStyle/>
           <a:p>
-            <a:pPr algn="ctr"/>
+            <a:pPr algn="ctr">
+              <a:spcBef>
+                <a:spcPts val="0"/>
+              </a:spcBef>
+              <a:spcAft>
+                <a:spcPts val="0"/>
+              </a:spcAft>
+            </a:pPr>
           </a:p>
         </p:txBody>
       </p:sp>
@@ -4090,14 +4237,21 @@
               <a:lnSpc>
                 <a:spcPct val="112000"/>
               </a:lnSpc>
+              <a:spcBef>
+                <a:spcPts val="0"/>
+              </a:spcBef>
+              <a:spcAft>
+                <a:spcPts val="0"/>
+              </a:spcAft>
             </a:pPr>
             <a:r>
-              <a:rPr sz="1500" b="1" i="0">
+              <a:rPr sz="1500" b="1" i="0" lang="zh-CN" altLang="zh-CN">
                 <a:solidFill>
                   <a:srgbClr val="1F4E79"/>
                 </a:solidFill>
                 <a:latin typeface="Microsoft YaHei"/>
                 <a:ea typeface="Microsoft YaHei"/>
+                <a:cs typeface="Microsoft YaHei"/>
               </a:rPr>
               <a:t>V1 · 单点 AI</a:t>
             </a:r>
@@ -4130,14 +4284,21 @@
               <a:lnSpc>
                 <a:spcPct val="112000"/>
               </a:lnSpc>
+              <a:spcBef>
+                <a:spcPts val="0"/>
+              </a:spcBef>
+              <a:spcAft>
+                <a:spcPts val="0"/>
+              </a:spcAft>
             </a:pPr>
             <a:r>
-              <a:rPr sz="1050" b="0" i="0">
+              <a:rPr sz="1050" b="0" i="0" lang="zh-CN" altLang="zh-CN">
                 <a:solidFill>
                   <a:srgbClr val="595959"/>
                 </a:solidFill>
                 <a:latin typeface="Microsoft YaHei"/>
                 <a:ea typeface="Microsoft YaHei"/>
+                <a:cs typeface="Microsoft YaHei"/>
               </a:rPr>
               <a:t>2025H1 试点商用</a:t>
             </a:r>
@@ -4152,8 +4313,8 @@
         </p:nvSpPr>
         <p:spPr>
           <a:xfrm>
-            <a:off x="4457700" y="1573645"/>
-            <a:ext cx="304800" cy="304800"/>
+            <a:off x="4317174" y="1501636"/>
+            <a:ext cx="585851" cy="448818"/>
           </a:xfrm>
           <a:prstGeom prst="rect">
             <a:avLst/>
@@ -4170,14 +4331,21 @@
               <a:lnSpc>
                 <a:spcPct val="112000"/>
               </a:lnSpc>
+              <a:spcBef>
+                <a:spcPts val="0"/>
+              </a:spcBef>
+              <a:spcAft>
+                <a:spcPts val="0"/>
+              </a:spcAft>
             </a:pPr>
             <a:r>
-              <a:rPr sz="2700" b="1" i="0">
+              <a:rPr sz="2700" b="1" i="0" lang="zh-CN" altLang="zh-CN">
                 <a:solidFill>
                   <a:srgbClr val="1F4E79"/>
                 </a:solidFill>
                 <a:latin typeface="Microsoft YaHei"/>
                 <a:ea typeface="Microsoft YaHei"/>
+                <a:cs typeface="Microsoft YaHei"/>
               </a:rPr>
               <a:t>⚡</a:t>
             </a:r>
@@ -4210,14 +4378,21 @@
               <a:lnSpc>
                 <a:spcPct val="130000"/>
               </a:lnSpc>
+              <a:spcBef>
+                <a:spcPts val="0"/>
+              </a:spcBef>
+              <a:spcAft>
+                <a:spcPts val="0"/>
+              </a:spcAft>
             </a:pPr>
             <a:r>
-              <a:rPr sz="1100" b="0" i="0">
+              <a:rPr sz="1100" b="0" i="0" lang="zh-CN" altLang="zh-CN">
                 <a:solidFill>
                   <a:srgbClr val="262626"/>
                 </a:solidFill>
                 <a:latin typeface="Microsoft YaHei"/>
                 <a:ea typeface="Microsoft YaHei"/>
+                <a:cs typeface="Microsoft YaHei"/>
               </a:rPr>
               <a:t>通过 Shapley 值筛选出 15 维核心特征, 以 AI 推理闭环替代固定规则门限, 推理时延控制在 2ms 以内。试点小区吞吐提升 7% 且掉话率持平无劣化, 模型支持周级迭代更新, 已在单站点完成独立部署验证, 证明 AI 调度在现网环境下可行且收益可量化。</a:t>
             </a:r>
@@ -4264,7 +4439,14 @@
           <a:bodyPr rtlCol="0" anchor="ctr"/>
           <a:lstStyle/>
           <a:p>
-            <a:pPr algn="ctr"/>
+            <a:pPr algn="ctr">
+              <a:spcBef>
+                <a:spcPts val="0"/>
+              </a:spcBef>
+              <a:spcAft>
+                <a:spcPts val="0"/>
+              </a:spcAft>
+            </a:pPr>
           </a:p>
         </p:txBody>
       </p:sp>
@@ -4294,14 +4476,21 @@
               <a:lnSpc>
                 <a:spcPct val="112000"/>
               </a:lnSpc>
+              <a:spcBef>
+                <a:spcPts val="0"/>
+              </a:spcBef>
+              <a:spcAft>
+                <a:spcPts val="0"/>
+              </a:spcAft>
             </a:pPr>
             <a:r>
-              <a:rPr sz="1250" b="1" i="0">
+              <a:rPr sz="1250" b="1" i="0" lang="zh-CN" altLang="zh-CN">
                 <a:solidFill>
                   <a:srgbClr val="262626"/>
                 </a:solidFill>
                 <a:latin typeface="Microsoft YaHei"/>
                 <a:ea typeface="Microsoft YaHei"/>
+                <a:cs typeface="Microsoft YaHei"/>
               </a:rPr>
               <a:t>时延 &lt;2ms</a:t>
             </a:r>
@@ -4370,14 +4559,21 @@
               <a:lnSpc>
                 <a:spcPct val="112000"/>
               </a:lnSpc>
+              <a:spcBef>
+                <a:spcPts val="0"/>
+              </a:spcBef>
+              <a:spcAft>
+                <a:spcPts val="0"/>
+              </a:spcAft>
             </a:pPr>
             <a:r>
-              <a:rPr sz="950" b="0" i="0">
+              <a:rPr sz="950" b="0" i="0" lang="zh-CN" altLang="zh-CN">
                 <a:solidFill>
                   <a:srgbClr val="595959"/>
                 </a:solidFill>
                 <a:latin typeface="Microsoft YaHei"/>
                 <a:ea typeface="Microsoft YaHei"/>
+                <a:cs typeface="Microsoft YaHei"/>
               </a:rPr>
               <a:t>小区吞吐 (相对基线)</a:t>
             </a:r>
@@ -4392,8 +4588,8 @@
         </p:nvSpPr>
         <p:spPr>
           <a:xfrm>
-            <a:off x="3429000" y="4305300"/>
-            <a:ext cx="2362200" cy="381000"/>
+            <a:off x="3429000" y="4247324"/>
+            <a:ext cx="2362200" cy="496951"/>
           </a:xfrm>
           <a:prstGeom prst="rect">
             <a:avLst/>
@@ -4410,14 +4606,21 @@
               <a:lnSpc>
                 <a:spcPct val="112000"/>
               </a:lnSpc>
+              <a:spcBef>
+                <a:spcPts val="0"/>
+              </a:spcBef>
+              <a:spcAft>
+                <a:spcPts val="0"/>
+              </a:spcAft>
             </a:pPr>
             <a:r>
-              <a:rPr sz="3000" b="1" i="0">
+              <a:rPr sz="3000" b="1" i="0" lang="zh-CN" altLang="zh-CN">
                 <a:solidFill>
                   <a:srgbClr val="1F4E79"/>
                 </a:solidFill>
                 <a:latin typeface="Microsoft YaHei"/>
                 <a:ea typeface="Microsoft YaHei"/>
+                <a:cs typeface="Microsoft YaHei"/>
               </a:rPr>
               <a:t>1.07x</a:t>
             </a:r>
@@ -4464,7 +4667,14 @@
           <a:bodyPr rtlCol="0" anchor="ctr"/>
           <a:lstStyle/>
           <a:p>
-            <a:pPr algn="ctr"/>
+            <a:pPr algn="ctr">
+              <a:spcBef>
+                <a:spcPts val="0"/>
+              </a:spcBef>
+              <a:spcAft>
+                <a:spcPts val="0"/>
+              </a:spcAft>
+            </a:pPr>
           </a:p>
         </p:txBody>
       </p:sp>
@@ -4508,7 +4718,14 @@
           <a:bodyPr rtlCol="0" anchor="ctr"/>
           <a:lstStyle/>
           <a:p>
-            <a:pPr algn="ctr"/>
+            <a:pPr algn="ctr">
+              <a:spcBef>
+                <a:spcPts val="0"/>
+              </a:spcBef>
+              <a:spcAft>
+                <a:spcPts val="0"/>
+              </a:spcAft>
+            </a:pPr>
           </a:p>
         </p:txBody>
       </p:sp>
@@ -4554,7 +4771,14 @@
           <a:bodyPr rtlCol="0" anchor="ctr"/>
           <a:lstStyle/>
           <a:p>
-            <a:pPr algn="ctr"/>
+            <a:pPr algn="ctr">
+              <a:spcBef>
+                <a:spcPts val="0"/>
+              </a:spcBef>
+              <a:spcAft>
+                <a:spcPts val="0"/>
+              </a:spcAft>
+            </a:pPr>
           </a:p>
         </p:txBody>
       </p:sp>
@@ -4600,7 +4824,14 @@
           <a:bodyPr rtlCol="0" anchor="ctr"/>
           <a:lstStyle/>
           <a:p>
-            <a:pPr algn="ctr"/>
+            <a:pPr algn="ctr">
+              <a:spcBef>
+                <a:spcPts val="0"/>
+              </a:spcBef>
+              <a:spcAft>
+                <a:spcPts val="0"/>
+              </a:spcAft>
+            </a:pPr>
           </a:p>
         </p:txBody>
       </p:sp>
@@ -4630,14 +4861,21 @@
               <a:lnSpc>
                 <a:spcPct val="112000"/>
               </a:lnSpc>
+              <a:spcBef>
+                <a:spcPts val="0"/>
+              </a:spcBef>
+              <a:spcAft>
+                <a:spcPts val="0"/>
+              </a:spcAft>
             </a:pPr>
             <a:r>
-              <a:rPr sz="900" b="0" i="0">
+              <a:rPr sz="900" b="0" i="0" lang="zh-CN" altLang="zh-CN">
                 <a:solidFill>
                   <a:srgbClr val="595959"/>
                 </a:solidFill>
                 <a:latin typeface="Microsoft YaHei"/>
                 <a:ea typeface="Microsoft YaHei"/>
+                <a:cs typeface="Microsoft YaHei"/>
               </a:rPr>
               <a:t>演进进度 2/4</a:t>
             </a:r>
@@ -4684,7 +4922,14 @@
           <a:bodyPr rtlCol="0" anchor="ctr"/>
           <a:lstStyle/>
           <a:p>
-            <a:pPr algn="ctr"/>
+            <a:pPr algn="ctr">
+              <a:spcBef>
+                <a:spcPts val="0"/>
+              </a:spcBef>
+              <a:spcAft>
+                <a:spcPts val="0"/>
+              </a:spcAft>
+            </a:pPr>
           </a:p>
         </p:txBody>
       </p:sp>
@@ -4730,7 +4975,14 @@
           <a:bodyPr rtlCol="0" anchor="ctr"/>
           <a:lstStyle/>
           <a:p>
-            <a:pPr algn="ctr"/>
+            <a:pPr algn="ctr">
+              <a:spcBef>
+                <a:spcPts val="0"/>
+              </a:spcBef>
+              <a:spcAft>
+                <a:spcPts val="0"/>
+              </a:spcAft>
+            </a:pPr>
           </a:p>
         </p:txBody>
       </p:sp>
@@ -4774,7 +5026,14 @@
           <a:bodyPr rtlCol="0" anchor="ctr"/>
           <a:lstStyle/>
           <a:p>
-            <a:pPr algn="ctr"/>
+            <a:pPr algn="ctr">
+              <a:spcBef>
+                <a:spcPts val="0"/>
+              </a:spcBef>
+              <a:spcAft>
+                <a:spcPts val="0"/>
+              </a:spcAft>
+            </a:pPr>
           </a:p>
         </p:txBody>
       </p:sp>
@@ -4804,14 +5063,21 @@
               <a:lnSpc>
                 <a:spcPct val="112000"/>
               </a:lnSpc>
+              <a:spcBef>
+                <a:spcPts val="0"/>
+              </a:spcBef>
+              <a:spcAft>
+                <a:spcPts val="0"/>
+              </a:spcAft>
             </a:pPr>
             <a:r>
-              <a:rPr sz="1500" b="1" i="0">
+              <a:rPr sz="1500" b="1" i="0" lang="zh-CN" altLang="zh-CN">
                 <a:solidFill>
                   <a:srgbClr val="FFFFFF"/>
                 </a:solidFill>
                 <a:latin typeface="Microsoft YaHei"/>
                 <a:ea typeface="Microsoft YaHei"/>
+                <a:cs typeface="Microsoft YaHei"/>
               </a:rPr>
               <a:t>V2 · 多场景泛化</a:t>
             </a:r>
@@ -4844,14 +5110,21 @@
               <a:lnSpc>
                 <a:spcPct val="112000"/>
               </a:lnSpc>
+              <a:spcBef>
+                <a:spcPts val="0"/>
+              </a:spcBef>
+              <a:spcAft>
+                <a:spcPts val="0"/>
+              </a:spcAft>
             </a:pPr>
             <a:r>
-              <a:rPr sz="1050" b="0" i="0">
+              <a:rPr sz="1050" b="0" i="0" lang="zh-CN" altLang="zh-CN">
                 <a:solidFill>
                   <a:srgbClr val="595959"/>
                 </a:solidFill>
                 <a:latin typeface="Microsoft YaHei"/>
                 <a:ea typeface="Microsoft YaHei"/>
+                <a:cs typeface="Microsoft YaHei"/>
               </a:rPr>
               <a:t>2025H2 规模灰度</a:t>
             </a:r>
@@ -4898,7 +5171,14 @@
           <a:bodyPr rtlCol="0" anchor="ctr"/>
           <a:lstStyle/>
           <a:p>
-            <a:pPr algn="ctr"/>
+            <a:pPr algn="ctr">
+              <a:spcBef>
+                <a:spcPts val="0"/>
+              </a:spcBef>
+              <a:spcAft>
+                <a:spcPts val="0"/>
+              </a:spcAft>
+            </a:pPr>
           </a:p>
         </p:txBody>
       </p:sp>
@@ -4942,7 +5222,14 @@
           <a:bodyPr rtlCol="0" anchor="ctr"/>
           <a:lstStyle/>
           <a:p>
-            <a:pPr algn="ctr"/>
+            <a:pPr algn="ctr">
+              <a:spcBef>
+                <a:spcPts val="0"/>
+              </a:spcBef>
+              <a:spcAft>
+                <a:spcPts val="0"/>
+              </a:spcAft>
+            </a:pPr>
           </a:p>
         </p:txBody>
       </p:sp>
@@ -4986,7 +5273,14 @@
           <a:bodyPr rtlCol="0" anchor="ctr"/>
           <a:lstStyle/>
           <a:p>
-            <a:pPr algn="ctr"/>
+            <a:pPr algn="ctr">
+              <a:spcBef>
+                <a:spcPts val="0"/>
+              </a:spcBef>
+              <a:spcAft>
+                <a:spcPts val="0"/>
+              </a:spcAft>
+            </a:pPr>
           </a:p>
         </p:txBody>
       </p:sp>
@@ -5124,14 +5418,21 @@
               <a:lnSpc>
                 <a:spcPct val="130000"/>
               </a:lnSpc>
+              <a:spcBef>
+                <a:spcPts val="0"/>
+              </a:spcBef>
+              <a:spcAft>
+                <a:spcPts val="0"/>
+              </a:spcAft>
             </a:pPr>
             <a:r>
-              <a:rPr sz="1100" b="0" i="0">
+              <a:rPr sz="1100" b="0" i="0" lang="zh-CN" altLang="zh-CN">
                 <a:solidFill>
                   <a:srgbClr val="262626"/>
                 </a:solidFill>
                 <a:latin typeface="Microsoft YaHei"/>
                 <a:ea typeface="Microsoft YaHei"/>
+                <a:cs typeface="Microsoft YaHei"/>
               </a:rPr>
               <a:t>引入多路径数据生成补齐稀缺场景样本, 区域与现网双场景联合训练, 实现一套模型覆盖多局点。规模灰度扩展至 1200 站, 小区吞吐提升 12%, 配合异常站点自动回退机制与灰度周报闭环跟踪, 保障了规模化推广全过程的安全可控与效果可见。</a:t>
             </a:r>
@@ -5178,7 +5479,14 @@
           <a:bodyPr rtlCol="0" anchor="ctr"/>
           <a:lstStyle/>
           <a:p>
-            <a:pPr algn="ctr"/>
+            <a:pPr algn="ctr">
+              <a:spcBef>
+                <a:spcPts val="0"/>
+              </a:spcBef>
+              <a:spcAft>
+                <a:spcPts val="0"/>
+              </a:spcAft>
+            </a:pPr>
           </a:p>
         </p:txBody>
       </p:sp>
@@ -5208,14 +5516,21 @@
               <a:lnSpc>
                 <a:spcPct val="112000"/>
               </a:lnSpc>
+              <a:spcBef>
+                <a:spcPts val="0"/>
+              </a:spcBef>
+              <a:spcAft>
+                <a:spcPts val="0"/>
+              </a:spcAft>
             </a:pPr>
             <a:r>
-              <a:rPr sz="1250" b="1" i="0">
+              <a:rPr sz="1250" b="1" i="0" lang="zh-CN" altLang="zh-CN">
                 <a:solidFill>
                   <a:srgbClr val="262626"/>
                 </a:solidFill>
                 <a:latin typeface="Microsoft YaHei"/>
                 <a:ea typeface="Microsoft YaHei"/>
+                <a:cs typeface="Microsoft YaHei"/>
               </a:rPr>
               <a:t>灰度 1200 站</a:t>
             </a:r>
@@ -5284,14 +5599,21 @@
               <a:lnSpc>
                 <a:spcPct val="112000"/>
               </a:lnSpc>
+              <a:spcBef>
+                <a:spcPts val="0"/>
+              </a:spcBef>
+              <a:spcAft>
+                <a:spcPts val="0"/>
+              </a:spcAft>
             </a:pPr>
             <a:r>
-              <a:rPr sz="950" b="0" i="0">
+              <a:rPr sz="950" b="0" i="0" lang="zh-CN" altLang="zh-CN">
                 <a:solidFill>
                   <a:srgbClr val="595959"/>
                 </a:solidFill>
                 <a:latin typeface="Microsoft YaHei"/>
                 <a:ea typeface="Microsoft YaHei"/>
+                <a:cs typeface="Microsoft YaHei"/>
               </a:rPr>
               <a:t>小区吞吐 (相对基线)</a:t>
             </a:r>
@@ -5306,8 +5628,8 @@
         </p:nvSpPr>
         <p:spPr>
           <a:xfrm>
-            <a:off x="6400800" y="4305300"/>
-            <a:ext cx="2362200" cy="381000"/>
+            <a:off x="6400800" y="4247324"/>
+            <a:ext cx="2362200" cy="496951"/>
           </a:xfrm>
           <a:prstGeom prst="rect">
             <a:avLst/>
@@ -5324,14 +5646,21 @@
               <a:lnSpc>
                 <a:spcPct val="112000"/>
               </a:lnSpc>
+              <a:spcBef>
+                <a:spcPts val="0"/>
+              </a:spcBef>
+              <a:spcAft>
+                <a:spcPts val="0"/>
+              </a:spcAft>
             </a:pPr>
             <a:r>
-              <a:rPr sz="3000" b="1" i="0">
+              <a:rPr sz="3000" b="1" i="0" lang="zh-CN" altLang="zh-CN">
                 <a:solidFill>
                   <a:srgbClr val="1F4E79"/>
                 </a:solidFill>
                 <a:latin typeface="Microsoft YaHei"/>
                 <a:ea typeface="Microsoft YaHei"/>
+                <a:cs typeface="Microsoft YaHei"/>
               </a:rPr>
               <a:t>1.12x</a:t>
             </a:r>
@@ -5378,7 +5707,14 @@
           <a:bodyPr rtlCol="0" anchor="ctr"/>
           <a:lstStyle/>
           <a:p>
-            <a:pPr algn="ctr"/>
+            <a:pPr algn="ctr">
+              <a:spcBef>
+                <a:spcPts val="0"/>
+              </a:spcBef>
+              <a:spcAft>
+                <a:spcPts val="0"/>
+              </a:spcAft>
+            </a:pPr>
           </a:p>
         </p:txBody>
       </p:sp>
@@ -5422,7 +5758,14 @@
           <a:bodyPr rtlCol="0" anchor="ctr"/>
           <a:lstStyle/>
           <a:p>
-            <a:pPr algn="ctr"/>
+            <a:pPr algn="ctr">
+              <a:spcBef>
+                <a:spcPts val="0"/>
+              </a:spcBef>
+              <a:spcAft>
+                <a:spcPts val="0"/>
+              </a:spcAft>
+            </a:pPr>
           </a:p>
         </p:txBody>
       </p:sp>
@@ -5466,7 +5809,14 @@
           <a:bodyPr rtlCol="0" anchor="ctr"/>
           <a:lstStyle/>
           <a:p>
-            <a:pPr algn="ctr"/>
+            <a:pPr algn="ctr">
+              <a:spcBef>
+                <a:spcPts val="0"/>
+              </a:spcBef>
+              <a:spcAft>
+                <a:spcPts val="0"/>
+              </a:spcAft>
+            </a:pPr>
           </a:p>
         </p:txBody>
       </p:sp>
@@ -5512,7 +5862,14 @@
           <a:bodyPr rtlCol="0" anchor="ctr"/>
           <a:lstStyle/>
           <a:p>
-            <a:pPr algn="ctr"/>
+            <a:pPr algn="ctr">
+              <a:spcBef>
+                <a:spcPts val="0"/>
+              </a:spcBef>
+              <a:spcAft>
+                <a:spcPts val="0"/>
+              </a:spcAft>
+            </a:pPr>
           </a:p>
         </p:txBody>
       </p:sp>
@@ -5542,14 +5899,21 @@
               <a:lnSpc>
                 <a:spcPct val="112000"/>
               </a:lnSpc>
+              <a:spcBef>
+                <a:spcPts val="0"/>
+              </a:spcBef>
+              <a:spcAft>
+                <a:spcPts val="0"/>
+              </a:spcAft>
             </a:pPr>
             <a:r>
-              <a:rPr sz="900" b="0" i="0">
+              <a:rPr sz="900" b="0" i="0" lang="zh-CN" altLang="zh-CN">
                 <a:solidFill>
                   <a:srgbClr val="595959"/>
                 </a:solidFill>
                 <a:latin typeface="Microsoft YaHei"/>
                 <a:ea typeface="Microsoft YaHei"/>
+                <a:cs typeface="Microsoft YaHei"/>
               </a:rPr>
               <a:t>演进进度 3/4</a:t>
             </a:r>
@@ -5596,7 +5960,14 @@
           <a:bodyPr rtlCol="0" anchor="ctr"/>
           <a:lstStyle/>
           <a:p>
-            <a:pPr algn="ctr"/>
+            <a:pPr algn="ctr">
+              <a:spcBef>
+                <a:spcPts val="0"/>
+              </a:spcBef>
+              <a:spcAft>
+                <a:spcPts val="0"/>
+              </a:spcAft>
+            </a:pPr>
           </a:p>
         </p:txBody>
       </p:sp>
@@ -5642,7 +6013,14 @@
           <a:bodyPr rtlCol="0" anchor="ctr"/>
           <a:lstStyle/>
           <a:p>
-            <a:pPr algn="ctr"/>
+            <a:pPr algn="ctr">
+              <a:spcBef>
+                <a:spcPts val="0"/>
+              </a:spcBef>
+              <a:spcAft>
+                <a:spcPts val="0"/>
+              </a:spcAft>
+            </a:pPr>
           </a:p>
         </p:txBody>
       </p:sp>
@@ -5686,7 +6064,14 @@
           <a:bodyPr rtlCol="0" anchor="ctr"/>
           <a:lstStyle/>
           <a:p>
-            <a:pPr algn="ctr"/>
+            <a:pPr algn="ctr">
+              <a:spcBef>
+                <a:spcPts val="0"/>
+              </a:spcBef>
+              <a:spcAft>
+                <a:spcPts val="0"/>
+              </a:spcAft>
+            </a:pPr>
           </a:p>
         </p:txBody>
       </p:sp>
@@ -5716,14 +6101,21 @@
               <a:lnSpc>
                 <a:spcPct val="112000"/>
               </a:lnSpc>
+              <a:spcBef>
+                <a:spcPts val="0"/>
+              </a:spcBef>
+              <a:spcAft>
+                <a:spcPts val="0"/>
+              </a:spcAft>
             </a:pPr>
             <a:r>
-              <a:rPr sz="1500" b="1" i="0">
+              <a:rPr sz="1500" b="1" i="0" lang="zh-CN" altLang="zh-CN">
                 <a:solidFill>
                   <a:srgbClr val="FFFFFF"/>
                 </a:solidFill>
                 <a:latin typeface="Microsoft YaHei"/>
                 <a:ea typeface="Microsoft YaHei"/>
+                <a:cs typeface="Microsoft YaHei"/>
               </a:rPr>
               <a:t>目标 · 全网自智</a:t>
             </a:r>
@@ -5756,14 +6148,21 @@
               <a:lnSpc>
                 <a:spcPct val="112000"/>
               </a:lnSpc>
+              <a:spcBef>
+                <a:spcPts val="0"/>
+              </a:spcBef>
+              <a:spcAft>
+                <a:spcPts val="0"/>
+              </a:spcAft>
             </a:pPr>
             <a:r>
-              <a:rPr sz="1050" b="0" i="0">
+              <a:rPr sz="1050" b="0" i="0" lang="zh-CN" altLang="zh-CN">
                 <a:solidFill>
                   <a:srgbClr val="595959"/>
                 </a:solidFill>
                 <a:latin typeface="Microsoft YaHei"/>
                 <a:ea typeface="Microsoft YaHei"/>
+                <a:cs typeface="Microsoft YaHei"/>
               </a:rPr>
               <a:t>2026H2 全网商用</a:t>
             </a:r>
@@ -5810,7 +6209,14 @@
           <a:bodyPr rtlCol="0" anchor="ctr"/>
           <a:lstStyle/>
           <a:p>
-            <a:pPr algn="ctr"/>
+            <a:pPr algn="ctr">
+              <a:spcBef>
+                <a:spcPts val="0"/>
+              </a:spcBef>
+              <a:spcAft>
+                <a:spcPts val="0"/>
+              </a:spcAft>
+            </a:pPr>
           </a:p>
         </p:txBody>
       </p:sp>
@@ -5854,7 +6260,14 @@
           <a:bodyPr rtlCol="0" anchor="ctr"/>
           <a:lstStyle/>
           <a:p>
-            <a:pPr algn="ctr"/>
+            <a:pPr algn="ctr">
+              <a:spcBef>
+                <a:spcPts val="0"/>
+              </a:spcBef>
+              <a:spcAft>
+                <a:spcPts val="0"/>
+              </a:spcAft>
+            </a:pPr>
           </a:p>
         </p:txBody>
       </p:sp>
@@ -5898,7 +6311,14 @@
           <a:bodyPr rtlCol="0" anchor="ctr"/>
           <a:lstStyle/>
           <a:p>
-            <a:pPr algn="ctr"/>
+            <a:pPr algn="ctr">
+              <a:spcBef>
+                <a:spcPts val="0"/>
+              </a:spcBef>
+              <a:spcAft>
+                <a:spcPts val="0"/>
+              </a:spcAft>
+            </a:pPr>
           </a:p>
         </p:txBody>
       </p:sp>
@@ -5910,8 +6330,8 @@
         </p:nvSpPr>
         <p:spPr>
           <a:xfrm>
-            <a:off x="9410700" y="1968500"/>
-            <a:ext cx="2286000" cy="1587500"/>
+            <a:off x="9387649" y="1968500"/>
+            <a:ext cx="2332101" cy="1587500"/>
           </a:xfrm>
           <a:prstGeom prst="rect">
             <a:avLst/>
@@ -5928,14 +6348,21 @@
               <a:lnSpc>
                 <a:spcPct val="130000"/>
               </a:lnSpc>
+              <a:spcBef>
+                <a:spcPts val="0"/>
+              </a:spcBef>
+              <a:spcAft>
+                <a:spcPts val="0"/>
+              </a:spcAft>
             </a:pPr>
             <a:r>
-              <a:rPr sz="1100" b="0" i="0">
+              <a:rPr sz="1100" b="0" i="0" lang="zh-CN" altLang="zh-CN">
                 <a:solidFill>
                   <a:srgbClr val="262626"/>
                 </a:solidFill>
                 <a:latin typeface="Microsoft YaHei"/>
                 <a:ea typeface="Microsoft YaHei"/>
+                <a:cs typeface="Microsoft YaHei"/>
               </a:rPr>
               <a:t>基于长周期干扰仿真实现模型自进化, 调度与能耗联合寻优带来 9% 能效提升。配合网级数据闭环治理与模型自监控自回滚能力, 目标小区吞吐累计提升 20%, 计划 2026H2 达成全网自智商用, 完成从单点智能到全网自治的最终跨越。</a:t>
             </a:r>
@@ -5982,7 +6409,14 @@
           <a:bodyPr rtlCol="0" anchor="ctr"/>
           <a:lstStyle/>
           <a:p>
-            <a:pPr algn="ctr"/>
+            <a:pPr algn="ctr">
+              <a:spcBef>
+                <a:spcPts val="0"/>
+              </a:spcBef>
+              <a:spcAft>
+                <a:spcPts val="0"/>
+              </a:spcAft>
+            </a:pPr>
           </a:p>
         </p:txBody>
       </p:sp>
@@ -6012,14 +6446,21 @@
               <a:lnSpc>
                 <a:spcPct val="112000"/>
               </a:lnSpc>
+              <a:spcBef>
+                <a:spcPts val="0"/>
+              </a:spcBef>
+              <a:spcAft>
+                <a:spcPts val="0"/>
+              </a:spcAft>
             </a:pPr>
             <a:r>
-              <a:rPr sz="1250" b="1" i="0">
+              <a:rPr sz="1250" b="1" i="0" lang="zh-CN" altLang="zh-CN">
                 <a:solidFill>
                   <a:srgbClr val="262626"/>
                 </a:solidFill>
                 <a:latin typeface="Microsoft YaHei"/>
                 <a:ea typeface="Microsoft YaHei"/>
+                <a:cs typeface="Microsoft YaHei"/>
               </a:rPr>
               <a:t>能效 +9%</a:t>
             </a:r>
@@ -6088,14 +6529,21 @@
               <a:lnSpc>
                 <a:spcPct val="112000"/>
               </a:lnSpc>
+              <a:spcBef>
+                <a:spcPts val="0"/>
+              </a:spcBef>
+              <a:spcAft>
+                <a:spcPts val="0"/>
+              </a:spcAft>
             </a:pPr>
             <a:r>
-              <a:rPr sz="950" b="0" i="0">
+              <a:rPr sz="950" b="0" i="0" lang="zh-CN" altLang="zh-CN">
                 <a:solidFill>
                   <a:srgbClr val="595959"/>
                 </a:solidFill>
                 <a:latin typeface="Microsoft YaHei"/>
                 <a:ea typeface="Microsoft YaHei"/>
+                <a:cs typeface="Microsoft YaHei"/>
               </a:rPr>
               <a:t>小区吞吐 (相对基线)</a:t>
             </a:r>
@@ -6110,8 +6558,8 @@
         </p:nvSpPr>
         <p:spPr>
           <a:xfrm>
-            <a:off x="9372600" y="4305300"/>
-            <a:ext cx="2362200" cy="381000"/>
+            <a:off x="9372600" y="4247324"/>
+            <a:ext cx="2362200" cy="496951"/>
           </a:xfrm>
           <a:prstGeom prst="rect">
             <a:avLst/>
@@ -6128,14 +6576,21 @@
               <a:lnSpc>
                 <a:spcPct val="112000"/>
               </a:lnSpc>
+              <a:spcBef>
+                <a:spcPts val="0"/>
+              </a:spcBef>
+              <a:spcAft>
+                <a:spcPts val="0"/>
+              </a:spcAft>
             </a:pPr>
             <a:r>
-              <a:rPr sz="3000" b="1" i="0">
+              <a:rPr sz="3000" b="1" i="0" lang="zh-CN" altLang="zh-CN">
                 <a:solidFill>
                   <a:srgbClr val="B90A0A"/>
                 </a:solidFill>
                 <a:latin typeface="Microsoft YaHei"/>
                 <a:ea typeface="Microsoft YaHei"/>
+                <a:cs typeface="Microsoft YaHei"/>
               </a:rPr>
               <a:t>1.20x</a:t>
             </a:r>
@@ -6182,7 +6637,14 @@
           <a:bodyPr rtlCol="0" anchor="ctr"/>
           <a:lstStyle/>
           <a:p>
-            <a:pPr algn="ctr"/>
+            <a:pPr algn="ctr">
+              <a:spcBef>
+                <a:spcPts val="0"/>
+              </a:spcBef>
+              <a:spcAft>
+                <a:spcPts val="0"/>
+              </a:spcAft>
+            </a:pPr>
           </a:p>
         </p:txBody>
       </p:sp>
@@ -6226,7 +6688,14 @@
           <a:bodyPr rtlCol="0" anchor="ctr"/>
           <a:lstStyle/>
           <a:p>
-            <a:pPr algn="ctr"/>
+            <a:pPr algn="ctr">
+              <a:spcBef>
+                <a:spcPts val="0"/>
+              </a:spcBef>
+              <a:spcAft>
+                <a:spcPts val="0"/>
+              </a:spcAft>
+            </a:pPr>
           </a:p>
         </p:txBody>
       </p:sp>
@@ -6270,7 +6739,14 @@
           <a:bodyPr rtlCol="0" anchor="ctr"/>
           <a:lstStyle/>
           <a:p>
-            <a:pPr algn="ctr"/>
+            <a:pPr algn="ctr">
+              <a:spcBef>
+                <a:spcPts val="0"/>
+              </a:spcBef>
+              <a:spcAft>
+                <a:spcPts val="0"/>
+              </a:spcAft>
+            </a:pPr>
           </a:p>
         </p:txBody>
       </p:sp>
@@ -6314,7 +6790,14 @@
           <a:bodyPr rtlCol="0" anchor="ctr"/>
           <a:lstStyle/>
           <a:p>
-            <a:pPr algn="ctr"/>
+            <a:pPr algn="ctr">
+              <a:spcBef>
+                <a:spcPts val="0"/>
+              </a:spcBef>
+              <a:spcAft>
+                <a:spcPts val="0"/>
+              </a:spcAft>
+            </a:pPr>
           </a:p>
         </p:txBody>
       </p:sp>
@@ -6344,14 +6827,21 @@
               <a:lnSpc>
                 <a:spcPct val="112000"/>
               </a:lnSpc>
+              <a:spcBef>
+                <a:spcPts val="0"/>
+              </a:spcBef>
+              <a:spcAft>
+                <a:spcPts val="0"/>
+              </a:spcAft>
             </a:pPr>
             <a:r>
-              <a:rPr sz="900" b="0" i="0">
+              <a:rPr sz="900" b="0" i="0" lang="zh-CN" altLang="zh-CN">
                 <a:solidFill>
                   <a:srgbClr val="595959"/>
                 </a:solidFill>
                 <a:latin typeface="Microsoft YaHei"/>
                 <a:ea typeface="Microsoft YaHei"/>
+                <a:cs typeface="Microsoft YaHei"/>
               </a:rPr>
               <a:t>演进进度 4/4</a:t>
             </a:r>
@@ -6398,7 +6888,14 @@
           <a:bodyPr rtlCol="0" anchor="ctr"/>
           <a:lstStyle/>
           <a:p>
-            <a:pPr algn="ctr"/>
+            <a:pPr algn="ctr">
+              <a:spcBef>
+                <a:spcPts val="0"/>
+              </a:spcBef>
+              <a:spcAft>
+                <a:spcPts val="0"/>
+              </a:spcAft>
+            </a:pPr>
           </a:p>
         </p:txBody>
       </p:sp>
@@ -6442,7 +6939,14 @@
           <a:bodyPr rtlCol="0" anchor="ctr"/>
           <a:lstStyle/>
           <a:p>
-            <a:pPr algn="ctr"/>
+            <a:pPr algn="ctr">
+              <a:spcBef>
+                <a:spcPts val="0"/>
+              </a:spcBef>
+              <a:spcAft>
+                <a:spcPts val="0"/>
+              </a:spcAft>
+            </a:pPr>
           </a:p>
         </p:txBody>
       </p:sp>
@@ -6472,14 +6976,21 @@
               <a:lnSpc>
                 <a:spcPct val="112000"/>
               </a:lnSpc>
+              <a:spcBef>
+                <a:spcPts val="0"/>
+              </a:spcBef>
+              <a:spcAft>
+                <a:spcPts val="0"/>
+              </a:spcAft>
             </a:pPr>
             <a:r>
-              <a:rPr sz="1350" b="1" i="0">
+              <a:rPr sz="1350" b="1" i="0" lang="zh-CN" altLang="zh-CN">
                 <a:solidFill>
                   <a:srgbClr val="1F4E79"/>
                 </a:solidFill>
                 <a:latin typeface="Microsoft YaHei"/>
                 <a:ea typeface="Microsoft YaHei"/>
+                <a:cs typeface="Microsoft YaHei"/>
               </a:rPr>
               <a:t>总判断: 四阶段演进路径现网验证有效, V2 规模灰度全部达标, 2026H2 具备全网自智商用条件</a:t>
             </a:r>
@@ -6526,7 +7037,14 @@
           <a:bodyPr rtlCol="0" anchor="ctr"/>
           <a:lstStyle/>
           <a:p>
-            <a:pPr algn="ctr"/>
+            <a:pPr algn="ctr">
+              <a:spcBef>
+                <a:spcPts val="0"/>
+              </a:spcBef>
+              <a:spcAft>
+                <a:spcPts val="0"/>
+              </a:spcAft>
+            </a:pPr>
           </a:p>
         </p:txBody>
       </p:sp>
@@ -6556,14 +7074,21 @@
               <a:lnSpc>
                 <a:spcPct val="112000"/>
               </a:lnSpc>
+              <a:spcBef>
+                <a:spcPts val="0"/>
+              </a:spcBef>
+              <a:spcAft>
+                <a:spcPts val="0"/>
+              </a:spcAft>
             </a:pPr>
             <a:r>
-              <a:rPr sz="1400" b="1" i="0">
+              <a:rPr sz="1400" b="1" i="0" lang="zh-CN" altLang="zh-CN">
                 <a:solidFill>
                   <a:srgbClr val="262626"/>
                 </a:solidFill>
                 <a:latin typeface="Microsoft YaHei"/>
                 <a:ea typeface="Microsoft YaHei"/>
+                <a:cs typeface="Microsoft YaHei"/>
               </a:rPr>
               <a:t>小区吞吐累计 +20%</a:t>
             </a:r>
